--- a/backend/app/services/presentation/templates/dizayn_ 5.pptx
+++ b/backend/app/services/presentation/templates/dizayn_ 5.pptx
@@ -238,7 +238,7 @@
           <a:p>
             <a:fld id="{F223FF85-4E34-4546-B772-76DFA4A6051B}" type="datetimeFigureOut">
               <a:rPr lang="en-US" smtClean="0"/>
-              <a:t>3/12/2026</a:t>
+              <a:t>4/18/2026</a:t>
             </a:fld>
             <a:endParaRPr lang="en-US"/>
           </a:p>
@@ -415,7 +415,7 @@
           <a:p>
             <a:fld id="{1B5CC398-6116-4BD2-9FAD-9822FDA158BE}" type="datetimeFigureOut">
               <a:rPr lang="en-US" smtClean="0"/>
-              <a:t>3/12/2026</a:t>
+              <a:t>4/18/2026</a:t>
             </a:fld>
             <a:endParaRPr lang="en-US"/>
           </a:p>
@@ -13894,8 +13894,8 @@
         </p:nvSpPr>
         <p:spPr>
           <a:xfrm>
-            <a:off x="6248400" y="2819400"/>
-            <a:ext cx="5029200" cy="1295400"/>
+            <a:off x="2556589" y="998376"/>
+            <a:ext cx="8721012" cy="3116424"/>
           </a:xfrm>
         </p:spPr>
         <p:txBody>
@@ -14903,6 +14903,26 @@
 </file>
 
 <file path=customXml/item2.xml><?xml version="1.0" encoding="utf-8"?>
+<p:properties xmlns:p="http://schemas.microsoft.com/office/2006/metadata/properties" xmlns:xsi="http://www.w3.org/2001/XMLSchema-instance" xmlns:pc="http://schemas.microsoft.com/office/infopath/2007/PartnerControls">
+  <documentManagement>
+    <_ip_UnifiedCompliancePolicyUIAction xmlns="http://schemas.microsoft.com/sharepoint/v3" xsi:nil="true"/>
+    <Image xmlns="71af3243-3dd4-4a8d-8c0d-dd76da1f02a5">
+      <Url xsi:nil="true"/>
+      <Description xsi:nil="true"/>
+    </Image>
+    <Status xmlns="71af3243-3dd4-4a8d-8c0d-dd76da1f02a5">Not started</Status>
+    <Background xmlns="71af3243-3dd4-4a8d-8c0d-dd76da1f02a5">false</Background>
+    <_ip_UnifiedCompliancePolicyProperties xmlns="http://schemas.microsoft.com/sharepoint/v3" xsi:nil="true"/>
+    <ImageTagsTaxHTField xmlns="71af3243-3dd4-4a8d-8c0d-dd76da1f02a5">
+      <Terms xmlns="http://schemas.microsoft.com/office/infopath/2007/PartnerControls"/>
+    </ImageTagsTaxHTField>
+    <TaxCatchAll xmlns="230e9df3-be65-4c73-a93b-d1236ebd677e" xsi:nil="true"/>
+    <MediaServiceKeyPoints xmlns="71af3243-3dd4-4a8d-8c0d-dd76da1f02a5" xsi:nil="true"/>
+  </documentManagement>
+</p:properties>
+</file>
+
+<file path=customXml/item3.xml><?xml version="1.0" encoding="utf-8"?>
 <ct:contentTypeSchema xmlns:ct="http://schemas.microsoft.com/office/2006/metadata/contentType" xmlns:ma="http://schemas.microsoft.com/office/2006/metadata/properties/metaAttributes" ct:_="" ma:_="" ma:contentTypeName="Document" ma:contentTypeID="0x01010079F111ED35F8CC479449609E8A0923A6" ma:contentTypeVersion="30" ma:contentTypeDescription="Create a new document." ma:contentTypeScope="" ma:versionID="cec0622158e8f13124e9e8fd4de31bd1">
   <xsd:schema xmlns:xsd="http://www.w3.org/2001/XMLSchema" xmlns:xs="http://www.w3.org/2001/XMLSchema" xmlns:p="http://schemas.microsoft.com/office/2006/metadata/properties" xmlns:ns1="http://schemas.microsoft.com/sharepoint/v3" xmlns:ns2="71af3243-3dd4-4a8d-8c0d-dd76da1f02a5" xmlns:ns3="16c05727-aa75-4e4a-9b5f-8a80a1165891" xmlns:ns4="230e9df3-be65-4c73-a93b-d1236ebd677e" targetNamespace="http://schemas.microsoft.com/office/2006/metadata/properties" ma:root="true" ma:fieldsID="3b52f30ab005d15df08657af532e6e38" ns1:_="" ns2:_="" ns3:_="" ns4:_="">
     <xsd:import namespace="http://schemas.microsoft.com/sharepoint/v3"/>
@@ -15220,26 +15240,6 @@
 </ct:contentTypeSchema>
 </file>
 
-<file path=customXml/item3.xml><?xml version="1.0" encoding="utf-8"?>
-<p:properties xmlns:p="http://schemas.microsoft.com/office/2006/metadata/properties" xmlns:xsi="http://www.w3.org/2001/XMLSchema-instance" xmlns:pc="http://schemas.microsoft.com/office/infopath/2007/PartnerControls">
-  <documentManagement>
-    <_ip_UnifiedCompliancePolicyUIAction xmlns="http://schemas.microsoft.com/sharepoint/v3" xsi:nil="true"/>
-    <Image xmlns="71af3243-3dd4-4a8d-8c0d-dd76da1f02a5">
-      <Url xsi:nil="true"/>
-      <Description xsi:nil="true"/>
-    </Image>
-    <Status xmlns="71af3243-3dd4-4a8d-8c0d-dd76da1f02a5">Not started</Status>
-    <Background xmlns="71af3243-3dd4-4a8d-8c0d-dd76da1f02a5">false</Background>
-    <_ip_UnifiedCompliancePolicyProperties xmlns="http://schemas.microsoft.com/sharepoint/v3" xsi:nil="true"/>
-    <ImageTagsTaxHTField xmlns="71af3243-3dd4-4a8d-8c0d-dd76da1f02a5">
-      <Terms xmlns="http://schemas.microsoft.com/office/infopath/2007/PartnerControls"/>
-    </ImageTagsTaxHTField>
-    <TaxCatchAll xmlns="230e9df3-be65-4c73-a93b-d1236ebd677e" xsi:nil="true"/>
-    <MediaServiceKeyPoints xmlns="71af3243-3dd4-4a8d-8c0d-dd76da1f02a5" xsi:nil="true"/>
-  </documentManagement>
-</p:properties>
-</file>
-
 <file path=customXml/itemProps1.xml><?xml version="1.0" encoding="utf-8"?>
 <ds:datastoreItem xmlns:ds="http://schemas.openxmlformats.org/officeDocument/2006/customXml" ds:itemID="{38E339AF-67FC-4BA3-8B2E-038B3ED310D5}">
   <ds:schemaRefs>
@@ -15249,6 +15249,25 @@
 </file>
 
 <file path=customXml/itemProps2.xml><?xml version="1.0" encoding="utf-8"?>
+<ds:datastoreItem xmlns:ds="http://schemas.openxmlformats.org/officeDocument/2006/customXml" ds:itemID="{4B99ED26-B189-4BA1-99D0-1112D8C2F106}">
+  <ds:schemaRefs>
+    <ds:schemaRef ds:uri="http://purl.org/dc/terms/"/>
+    <ds:schemaRef ds:uri="http://schemas.microsoft.com/office/2006/metadata/properties"/>
+    <ds:schemaRef ds:uri="http://purl.org/dc/dcmitype/"/>
+    <ds:schemaRef ds:uri="http://schemas.microsoft.com/office/2006/documentManagement/types"/>
+    <ds:schemaRef ds:uri="230e9df3-be65-4c73-a93b-d1236ebd677e"/>
+    <ds:schemaRef ds:uri="http://purl.org/dc/elements/1.1/"/>
+    <ds:schemaRef ds:uri="http://schemas.microsoft.com/office/infopath/2007/PartnerControls"/>
+    <ds:schemaRef ds:uri="http://www.w3.org/XML/1998/namespace"/>
+    <ds:schemaRef ds:uri="http://schemas.openxmlformats.org/package/2006/metadata/core-properties"/>
+    <ds:schemaRef ds:uri="16c05727-aa75-4e4a-9b5f-8a80a1165891"/>
+    <ds:schemaRef ds:uri="71af3243-3dd4-4a8d-8c0d-dd76da1f02a5"/>
+    <ds:schemaRef ds:uri="http://schemas.microsoft.com/sharepoint/v3"/>
+  </ds:schemaRefs>
+</ds:datastoreItem>
+</file>
+
+<file path=customXml/itemProps3.xml><?xml version="1.0" encoding="utf-8"?>
 <ds:datastoreItem xmlns:ds="http://schemas.openxmlformats.org/officeDocument/2006/customXml" ds:itemID="{3766CE19-BB35-48A2-AFDA-766E83330032}">
   <ds:schemaRefs>
     <ds:schemaRef ds:uri="16c05727-aa75-4e4a-9b5f-8a80a1165891"/>
@@ -15269,25 +15288,6 @@
 </ds:datastoreItem>
 </file>
 
-<file path=customXml/itemProps3.xml><?xml version="1.0" encoding="utf-8"?>
-<ds:datastoreItem xmlns:ds="http://schemas.openxmlformats.org/officeDocument/2006/customXml" ds:itemID="{4B99ED26-B189-4BA1-99D0-1112D8C2F106}">
-  <ds:schemaRefs>
-    <ds:schemaRef ds:uri="http://purl.org/dc/terms/"/>
-    <ds:schemaRef ds:uri="http://schemas.microsoft.com/office/2006/metadata/properties"/>
-    <ds:schemaRef ds:uri="http://purl.org/dc/dcmitype/"/>
-    <ds:schemaRef ds:uri="http://schemas.microsoft.com/office/2006/documentManagement/types"/>
-    <ds:schemaRef ds:uri="230e9df3-be65-4c73-a93b-d1236ebd677e"/>
-    <ds:schemaRef ds:uri="http://purl.org/dc/elements/1.1/"/>
-    <ds:schemaRef ds:uri="http://schemas.microsoft.com/office/infopath/2007/PartnerControls"/>
-    <ds:schemaRef ds:uri="http://www.w3.org/XML/1998/namespace"/>
-    <ds:schemaRef ds:uri="http://schemas.openxmlformats.org/package/2006/metadata/core-properties"/>
-    <ds:schemaRef ds:uri="16c05727-aa75-4e4a-9b5f-8a80a1165891"/>
-    <ds:schemaRef ds:uri="71af3243-3dd4-4a8d-8c0d-dd76da1f02a5"/>
-    <ds:schemaRef ds:uri="http://schemas.microsoft.com/sharepoint/v3"/>
-  </ds:schemaRefs>
-</ds:datastoreItem>
-</file>
-
 <file path=docMetadata/LabelInfo.xml><?xml version="1.0" encoding="utf-8"?>
 <clbl:labelList xmlns:clbl="http://schemas.microsoft.com/office/2020/mipLabelMetadata"/>
 </file>